--- a/eCOTS 2026 Oral Exams.pptx
+++ b/eCOTS 2026 Oral Exams.pptx
@@ -5,7 +5,7 @@
     <p:sldMasterId id="2147483648" r:id="rId1"/>
   </p:sldMasterIdLst>
   <p:notesMasterIdLst>
-    <p:notesMasterId r:id="rId19"/>
+    <p:notesMasterId r:id="rId20"/>
   </p:notesMasterIdLst>
   <p:sldIdLst>
     <p:sldId id="256" r:id="rId2"/>
@@ -18,13 +18,14 @@
     <p:sldId id="268" r:id="rId9"/>
     <p:sldId id="265" r:id="rId10"/>
     <p:sldId id="267" r:id="rId11"/>
-    <p:sldId id="266" r:id="rId12"/>
-    <p:sldId id="269" r:id="rId13"/>
-    <p:sldId id="270" r:id="rId14"/>
-    <p:sldId id="260" r:id="rId15"/>
-    <p:sldId id="261" r:id="rId16"/>
-    <p:sldId id="262" r:id="rId17"/>
-    <p:sldId id="263" r:id="rId18"/>
+    <p:sldId id="273" r:id="rId12"/>
+    <p:sldId id="266" r:id="rId13"/>
+    <p:sldId id="269" r:id="rId14"/>
+    <p:sldId id="270" r:id="rId15"/>
+    <p:sldId id="260" r:id="rId16"/>
+    <p:sldId id="261" r:id="rId17"/>
+    <p:sldId id="262" r:id="rId18"/>
+    <p:sldId id="263" r:id="rId19"/>
   </p:sldIdLst>
   <p:sldSz cx="12192000" cy="6858000"/>
   <p:notesSz cx="6858000" cy="9144000"/>
@@ -138,6 +139,7 @@
             <p14:sldId id="268"/>
             <p14:sldId id="265"/>
             <p14:sldId id="267"/>
+            <p14:sldId id="273"/>
             <p14:sldId id="266"/>
             <p14:sldId id="269"/>
             <p14:sldId id="270"/>
@@ -290,7 +292,7 @@
           <a:p>
             <a:fld id="{947604D3-08DC-4625-B6BA-EDA174851E58}" type="datetimeFigureOut">
               <a:rPr lang="en-US" smtClean="0"/>
-              <a:t>6/8/2026</a:t>
+              <a:t>6/14/2026</a:t>
             </a:fld>
             <a:endParaRPr lang="en-US"/>
           </a:p>
@@ -739,7 +741,10 @@
           <a:bodyPr/>
           <a:lstStyle/>
           <a:p>
-            <a:endParaRPr lang="en-US" dirty="0"/>
+            <a:r>
+              <a:rPr lang="en-US" dirty="0"/>
+              <a:t>Here, we could pull up an example of each “test”, as well as how we evaluated the students</a:t>
+            </a:r>
           </a:p>
         </p:txBody>
       </p:sp>
@@ -769,7 +774,7 @@
     </p:spTree>
     <p:extLst>
       <p:ext uri="{BB962C8B-B14F-4D97-AF65-F5344CB8AC3E}">
-        <p14:creationId xmlns:p14="http://schemas.microsoft.com/office/powerpoint/2010/main" val="3806378361"/>
+        <p14:creationId xmlns:p14="http://schemas.microsoft.com/office/powerpoint/2010/main" val="849594660"/>
       </p:ext>
     </p:extLst>
   </p:cSld>
@@ -853,7 +858,7 @@
     </p:spTree>
     <p:extLst>
       <p:ext uri="{BB962C8B-B14F-4D97-AF65-F5344CB8AC3E}">
-        <p14:creationId xmlns:p14="http://schemas.microsoft.com/office/powerpoint/2010/main" val="485954547"/>
+        <p14:creationId xmlns:p14="http://schemas.microsoft.com/office/powerpoint/2010/main" val="3806378361"/>
       </p:ext>
     </p:extLst>
   </p:cSld>
@@ -907,10 +912,7 @@
           <a:bodyPr/>
           <a:lstStyle/>
           <a:p>
-            <a:r>
-              <a:rPr lang="en-US" dirty="0"/>
-              <a:t>Other bullets I’m not thinking about?</a:t>
-            </a:r>
+            <a:endParaRPr lang="en-US" dirty="0"/>
           </a:p>
         </p:txBody>
       </p:sp>
@@ -940,7 +942,7 @@
     </p:spTree>
     <p:extLst>
       <p:ext uri="{BB962C8B-B14F-4D97-AF65-F5344CB8AC3E}">
-        <p14:creationId xmlns:p14="http://schemas.microsoft.com/office/powerpoint/2010/main" val="2742176703"/>
+        <p14:creationId xmlns:p14="http://schemas.microsoft.com/office/powerpoint/2010/main" val="485954547"/>
       </p:ext>
     </p:extLst>
   </p:cSld>
@@ -996,16 +998,7 @@
           <a:p>
             <a:r>
               <a:rPr lang="en-US" dirty="0"/>
-              <a:t>Maybe switch the order of these two groupings?</a:t>
-            </a:r>
-          </a:p>
-          <a:p>
-            <a:endParaRPr lang="en-US" dirty="0"/>
-          </a:p>
-          <a:p>
-            <a:r>
-              <a:rPr lang="en-US" dirty="0"/>
-              <a:t>Yes, I think so! (Done)</a:t>
+              <a:t>Other bullets I’m not thinking about?</a:t>
             </a:r>
           </a:p>
         </p:txBody>
@@ -1028,6 +1021,102 @@
             <a:fld id="{95A82AF3-FB5A-4FBE-8E9E-E0D407A949E2}" type="slidenum">
               <a:rPr lang="en-US" smtClean="0"/>
               <a:t>15</a:t>
+            </a:fld>
+            <a:endParaRPr lang="en-US"/>
+          </a:p>
+        </p:txBody>
+      </p:sp>
+    </p:spTree>
+    <p:extLst>
+      <p:ext uri="{BB962C8B-B14F-4D97-AF65-F5344CB8AC3E}">
+        <p14:creationId xmlns:p14="http://schemas.microsoft.com/office/powerpoint/2010/main" val="2742176703"/>
+      </p:ext>
+    </p:extLst>
+  </p:cSld>
+  <p:clrMapOvr>
+    <a:masterClrMapping/>
+  </p:clrMapOvr>
+</p:notes>
+</file>
+
+<file path=ppt/notesSlides/notesSlide14.xml><?xml version="1.0" encoding="utf-8"?>
+<p:notes xmlns:a="http://schemas.openxmlformats.org/drawingml/2006/main" xmlns:r="http://schemas.openxmlformats.org/officeDocument/2006/relationships" xmlns:p="http://schemas.openxmlformats.org/presentationml/2006/main">
+  <p:cSld>
+    <p:spTree>
+      <p:nvGrpSpPr>
+        <p:cNvPr id="1" name=""/>
+        <p:cNvGrpSpPr/>
+        <p:nvPr/>
+      </p:nvGrpSpPr>
+      <p:grpSpPr>
+        <a:xfrm>
+          <a:off x="0" y="0"/>
+          <a:ext cx="0" cy="0"/>
+          <a:chOff x="0" y="0"/>
+          <a:chExt cx="0" cy="0"/>
+        </a:xfrm>
+      </p:grpSpPr>
+      <p:sp>
+        <p:nvSpPr>
+          <p:cNvPr id="2" name="Slide Image Placeholder 1"/>
+          <p:cNvSpPr>
+            <a:spLocks noGrp="1" noRot="1" noChangeAspect="1"/>
+          </p:cNvSpPr>
+          <p:nvPr>
+            <p:ph type="sldImg"/>
+          </p:nvPr>
+        </p:nvSpPr>
+        <p:spPr/>
+      </p:sp>
+      <p:sp>
+        <p:nvSpPr>
+          <p:cNvPr id="3" name="Notes Placeholder 2"/>
+          <p:cNvSpPr>
+            <a:spLocks noGrp="1"/>
+          </p:cNvSpPr>
+          <p:nvPr>
+            <p:ph type="body" idx="1"/>
+          </p:nvPr>
+        </p:nvSpPr>
+        <p:spPr/>
+        <p:txBody>
+          <a:bodyPr/>
+          <a:lstStyle/>
+          <a:p>
+            <a:r>
+              <a:rPr lang="en-US" dirty="0"/>
+              <a:t>Maybe switch the order of these two groupings?</a:t>
+            </a:r>
+          </a:p>
+          <a:p>
+            <a:endParaRPr lang="en-US" dirty="0"/>
+          </a:p>
+          <a:p>
+            <a:r>
+              <a:rPr lang="en-US" dirty="0"/>
+              <a:t>Yes, I think so! (Done)</a:t>
+            </a:r>
+          </a:p>
+        </p:txBody>
+      </p:sp>
+      <p:sp>
+        <p:nvSpPr>
+          <p:cNvPr id="4" name="Slide Number Placeholder 3"/>
+          <p:cNvSpPr>
+            <a:spLocks noGrp="1"/>
+          </p:cNvSpPr>
+          <p:nvPr>
+            <p:ph type="sldNum" sz="quarter" idx="5"/>
+          </p:nvPr>
+        </p:nvSpPr>
+        <p:spPr/>
+        <p:txBody>
+          <a:bodyPr/>
+          <a:lstStyle/>
+          <a:p>
+            <a:fld id="{95A82AF3-FB5A-4FBE-8E9E-E0D407A949E2}" type="slidenum">
+              <a:rPr lang="en-US" smtClean="0"/>
+              <a:t>16</a:t>
             </a:fld>
             <a:endParaRPr lang="en-US"/>
           </a:p>
@@ -1777,7 +1866,13 @@
   <p:cSld>
     <p:spTree>
       <p:nvGrpSpPr>
-        <p:cNvPr id="1" name=""/>
+        <p:cNvPr id="1" name="">
+          <a:extLst>
+            <a:ext uri="{FF2B5EF4-FFF2-40B4-BE49-F238E27FC236}">
+              <a16:creationId xmlns:a16="http://schemas.microsoft.com/office/drawing/2014/main" id="{D840253B-E875-17A7-63C8-3158A4FB2D66}"/>
+            </a:ext>
+          </a:extLst>
+        </p:cNvPr>
         <p:cNvGrpSpPr/>
         <p:nvPr/>
       </p:nvGrpSpPr>
@@ -1791,7 +1886,13 @@
       </p:grpSpPr>
       <p:sp>
         <p:nvSpPr>
-          <p:cNvPr id="2" name="Slide Image Placeholder 1"/>
+          <p:cNvPr id="2" name="Slide Image Placeholder 1">
+            <a:extLst>
+              <a:ext uri="{FF2B5EF4-FFF2-40B4-BE49-F238E27FC236}">
+                <a16:creationId xmlns:a16="http://schemas.microsoft.com/office/drawing/2014/main" id="{A381B1A6-F443-E4AD-34DF-9939FD3852EE}"/>
+              </a:ext>
+            </a:extLst>
+          </p:cNvPr>
           <p:cNvSpPr>
             <a:spLocks noGrp="1" noRot="1" noChangeAspect="1"/>
           </p:cNvSpPr>
@@ -1803,7 +1904,13 @@
       </p:sp>
       <p:sp>
         <p:nvSpPr>
-          <p:cNvPr id="3" name="Notes Placeholder 2"/>
+          <p:cNvPr id="3" name="Notes Placeholder 2">
+            <a:extLst>
+              <a:ext uri="{FF2B5EF4-FFF2-40B4-BE49-F238E27FC236}">
+                <a16:creationId xmlns:a16="http://schemas.microsoft.com/office/drawing/2014/main" id="{7E943525-A19B-EB8A-BF0F-6275A6B68428}"/>
+              </a:ext>
+            </a:extLst>
+          </p:cNvPr>
           <p:cNvSpPr>
             <a:spLocks noGrp="1"/>
           </p:cNvSpPr>
@@ -1816,16 +1923,19 @@
           <a:bodyPr/>
           <a:lstStyle/>
           <a:p>
-            <a:r>
-              <a:rPr lang="en-US" dirty="0"/>
-              <a:t>Here, we could pull up an example of each “test”, as well as how we evaluated the students</a:t>
-            </a:r>
-          </a:p>
-        </p:txBody>
-      </p:sp>
-      <p:sp>
-        <p:nvSpPr>
-          <p:cNvPr id="4" name="Slide Number Placeholder 3"/>
+            <a:endParaRPr lang="en-US" dirty="0"/>
+          </a:p>
+        </p:txBody>
+      </p:sp>
+      <p:sp>
+        <p:nvSpPr>
+          <p:cNvPr id="4" name="Slide Number Placeholder 3">
+            <a:extLst>
+              <a:ext uri="{FF2B5EF4-FFF2-40B4-BE49-F238E27FC236}">
+                <a16:creationId xmlns:a16="http://schemas.microsoft.com/office/drawing/2014/main" id="{CF7A1A31-C92D-E2E9-8CA9-B1C1578F25C6}"/>
+              </a:ext>
+            </a:extLst>
+          </p:cNvPr>
           <p:cNvSpPr>
             <a:spLocks noGrp="1"/>
           </p:cNvSpPr>
@@ -1849,7 +1959,7 @@
     </p:spTree>
     <p:extLst>
       <p:ext uri="{BB962C8B-B14F-4D97-AF65-F5344CB8AC3E}">
-        <p14:creationId xmlns:p14="http://schemas.microsoft.com/office/powerpoint/2010/main" val="849594660"/>
+        <p14:creationId xmlns:p14="http://schemas.microsoft.com/office/powerpoint/2010/main" val="2249426986"/>
       </p:ext>
     </p:extLst>
   </p:cSld>
@@ -2006,7 +2116,7 @@
           <a:p>
             <a:fld id="{42D22C8A-5ABF-4B07-AADE-831C06312145}" type="datetimeFigureOut">
               <a:rPr lang="en-US" smtClean="0"/>
-              <a:t>6/8/2026</a:t>
+              <a:t>6/14/2026</a:t>
             </a:fld>
             <a:endParaRPr lang="en-US"/>
           </a:p>
@@ -2204,7 +2314,7 @@
           <a:p>
             <a:fld id="{42D22C8A-5ABF-4B07-AADE-831C06312145}" type="datetimeFigureOut">
               <a:rPr lang="en-US" smtClean="0"/>
-              <a:t>6/8/2026</a:t>
+              <a:t>6/14/2026</a:t>
             </a:fld>
             <a:endParaRPr lang="en-US"/>
           </a:p>
@@ -2412,7 +2522,7 @@
           <a:p>
             <a:fld id="{42D22C8A-5ABF-4B07-AADE-831C06312145}" type="datetimeFigureOut">
               <a:rPr lang="en-US" smtClean="0"/>
-              <a:t>6/8/2026</a:t>
+              <a:t>6/14/2026</a:t>
             </a:fld>
             <a:endParaRPr lang="en-US"/>
           </a:p>
@@ -2610,7 +2720,7 @@
           <a:p>
             <a:fld id="{42D22C8A-5ABF-4B07-AADE-831C06312145}" type="datetimeFigureOut">
               <a:rPr lang="en-US" smtClean="0"/>
-              <a:t>6/8/2026</a:t>
+              <a:t>6/14/2026</a:t>
             </a:fld>
             <a:endParaRPr lang="en-US"/>
           </a:p>
@@ -2885,7 +2995,7 @@
           <a:p>
             <a:fld id="{42D22C8A-5ABF-4B07-AADE-831C06312145}" type="datetimeFigureOut">
               <a:rPr lang="en-US" smtClean="0"/>
-              <a:t>6/8/2026</a:t>
+              <a:t>6/14/2026</a:t>
             </a:fld>
             <a:endParaRPr lang="en-US"/>
           </a:p>
@@ -3150,7 +3260,7 @@
           <a:p>
             <a:fld id="{42D22C8A-5ABF-4B07-AADE-831C06312145}" type="datetimeFigureOut">
               <a:rPr lang="en-US" smtClean="0"/>
-              <a:t>6/8/2026</a:t>
+              <a:t>6/14/2026</a:t>
             </a:fld>
             <a:endParaRPr lang="en-US"/>
           </a:p>
@@ -3562,7 +3672,7 @@
           <a:p>
             <a:fld id="{42D22C8A-5ABF-4B07-AADE-831C06312145}" type="datetimeFigureOut">
               <a:rPr lang="en-US" smtClean="0"/>
-              <a:t>6/8/2026</a:t>
+              <a:t>6/14/2026</a:t>
             </a:fld>
             <a:endParaRPr lang="en-US"/>
           </a:p>
@@ -3703,7 +3813,7 @@
           <a:p>
             <a:fld id="{42D22C8A-5ABF-4B07-AADE-831C06312145}" type="datetimeFigureOut">
               <a:rPr lang="en-US" smtClean="0"/>
-              <a:t>6/8/2026</a:t>
+              <a:t>6/14/2026</a:t>
             </a:fld>
             <a:endParaRPr lang="en-US"/>
           </a:p>
@@ -3816,7 +3926,7 @@
           <a:p>
             <a:fld id="{42D22C8A-5ABF-4B07-AADE-831C06312145}" type="datetimeFigureOut">
               <a:rPr lang="en-US" smtClean="0"/>
-              <a:t>6/8/2026</a:t>
+              <a:t>6/14/2026</a:t>
             </a:fld>
             <a:endParaRPr lang="en-US"/>
           </a:p>
@@ -4127,7 +4237,7 @@
           <a:p>
             <a:fld id="{42D22C8A-5ABF-4B07-AADE-831C06312145}" type="datetimeFigureOut">
               <a:rPr lang="en-US" smtClean="0"/>
-              <a:t>6/8/2026</a:t>
+              <a:t>6/14/2026</a:t>
             </a:fld>
             <a:endParaRPr lang="en-US"/>
           </a:p>
@@ -4415,7 +4525,7 @@
           <a:p>
             <a:fld id="{42D22C8A-5ABF-4B07-AADE-831C06312145}" type="datetimeFigureOut">
               <a:rPr lang="en-US" smtClean="0"/>
-              <a:t>6/8/2026</a:t>
+              <a:t>6/14/2026</a:t>
             </a:fld>
             <a:endParaRPr lang="en-US"/>
           </a:p>
@@ -4656,7 +4766,7 @@
           <a:p>
             <a:fld id="{42D22C8A-5ABF-4B07-AADE-831C06312145}" type="datetimeFigureOut">
               <a:rPr lang="en-US" smtClean="0"/>
-              <a:t>6/8/2026</a:t>
+              <a:t>6/14/2026</a:t>
             </a:fld>
             <a:endParaRPr lang="en-US"/>
           </a:p>
@@ -5586,6 +5696,148 @@
         <p:cNvPr id="1" name="">
           <a:extLst>
             <a:ext uri="{FF2B5EF4-FFF2-40B4-BE49-F238E27FC236}">
+              <a16:creationId xmlns:a16="http://schemas.microsoft.com/office/drawing/2014/main" id="{66130728-F55E-25CA-496C-04107DED744E}"/>
+            </a:ext>
+          </a:extLst>
+        </p:cNvPr>
+        <p:cNvGrpSpPr/>
+        <p:nvPr/>
+      </p:nvGrpSpPr>
+      <p:grpSpPr>
+        <a:xfrm>
+          <a:off x="0" y="0"/>
+          <a:ext cx="0" cy="0"/>
+          <a:chOff x="0" y="0"/>
+          <a:chExt cx="0" cy="0"/>
+        </a:xfrm>
+      </p:grpSpPr>
+      <p:pic>
+        <p:nvPicPr>
+          <p:cNvPr id="5" name="Content Placeholder 4">
+            <a:extLst>
+              <a:ext uri="{FF2B5EF4-FFF2-40B4-BE49-F238E27FC236}">
+                <a16:creationId xmlns:a16="http://schemas.microsoft.com/office/drawing/2014/main" id="{ACEBBDA5-C7D8-16B1-5992-1F94E20F02C8}"/>
+              </a:ext>
+            </a:extLst>
+          </p:cNvPr>
+          <p:cNvPicPr>
+            <a:picLocks noGrp="1" noChangeAspect="1"/>
+          </p:cNvPicPr>
+          <p:nvPr>
+            <p:ph idx="1"/>
+          </p:nvPr>
+        </p:nvPicPr>
+        <p:blipFill>
+          <a:blip r:embed="rId3">
+            <a:extLst>
+              <a:ext uri="{28A0092B-C50C-407E-A947-70E740481C1C}">
+                <a14:useLocalDpi xmlns:a14="http://schemas.microsoft.com/office/drawing/2010/main" val="0"/>
+              </a:ext>
+            </a:extLst>
+          </a:blip>
+          <a:stretch>
+            <a:fillRect/>
+          </a:stretch>
+        </p:blipFill>
+        <p:spPr>
+          <a:xfrm>
+            <a:off x="281354" y="271305"/>
+            <a:ext cx="11599921" cy="6330462"/>
+          </a:xfrm>
+          <a:prstGeom prst="rect">
+            <a:avLst/>
+          </a:prstGeom>
+        </p:spPr>
+      </p:pic>
+      <p:sp>
+        <p:nvSpPr>
+          <p:cNvPr id="2" name="Title 1">
+            <a:extLst>
+              <a:ext uri="{FF2B5EF4-FFF2-40B4-BE49-F238E27FC236}">
+                <a16:creationId xmlns:a16="http://schemas.microsoft.com/office/drawing/2014/main" id="{FEC9E5DE-F271-DE75-273E-17E49AA929A2}"/>
+              </a:ext>
+            </a:extLst>
+          </p:cNvPr>
+          <p:cNvSpPr>
+            <a:spLocks noGrp="1"/>
+          </p:cNvSpPr>
+          <p:nvPr>
+            <p:ph type="title"/>
+          </p:nvPr>
+        </p:nvSpPr>
+        <p:spPr/>
+        <p:txBody>
+          <a:bodyPr/>
+          <a:lstStyle/>
+          <a:p>
+            <a:r>
+              <a:rPr lang="en-US" dirty="0"/>
+              <a:t>Rubric</a:t>
+            </a:r>
+          </a:p>
+        </p:txBody>
+      </p:sp>
+      <p:pic>
+        <p:nvPicPr>
+          <p:cNvPr id="4" name="Picture 3">
+            <a:extLst>
+              <a:ext uri="{FF2B5EF4-FFF2-40B4-BE49-F238E27FC236}">
+                <a16:creationId xmlns:a16="http://schemas.microsoft.com/office/drawing/2014/main" id="{316B88F2-AB4C-ABD8-6EAE-B8DBC15055CD}"/>
+              </a:ext>
+            </a:extLst>
+          </p:cNvPr>
+          <p:cNvPicPr>
+            <a:picLocks noChangeAspect="1"/>
+          </p:cNvPicPr>
+          <p:nvPr/>
+        </p:nvPicPr>
+        <p:blipFill>
+          <a:blip r:embed="rId4"/>
+          <a:stretch>
+            <a:fillRect/>
+          </a:stretch>
+        </p:blipFill>
+        <p:spPr>
+          <a:xfrm>
+            <a:off x="1176269" y="1513276"/>
+            <a:ext cx="8427077" cy="4644168"/>
+          </a:xfrm>
+          <a:prstGeom prst="rect">
+            <a:avLst/>
+          </a:prstGeom>
+          <a:ln>
+            <a:noFill/>
+          </a:ln>
+          <a:effectLst>
+            <a:outerShdw blurRad="292100" dist="139700" dir="2700000" algn="tl" rotWithShape="0">
+              <a:srgbClr val="333333">
+                <a:alpha val="65000"/>
+              </a:srgbClr>
+            </a:outerShdw>
+          </a:effectLst>
+        </p:spPr>
+      </p:pic>
+    </p:spTree>
+    <p:extLst>
+      <p:ext uri="{BB962C8B-B14F-4D97-AF65-F5344CB8AC3E}">
+        <p14:creationId xmlns:p14="http://schemas.microsoft.com/office/powerpoint/2010/main" val="3592104557"/>
+      </p:ext>
+    </p:extLst>
+  </p:cSld>
+  <p:clrMapOvr>
+    <a:masterClrMapping/>
+  </p:clrMapOvr>
+</p:sld>
+</file>
+
+<file path=ppt/slides/slide12.xml><?xml version="1.0" encoding="utf-8"?>
+<p:sld xmlns:a="http://schemas.openxmlformats.org/drawingml/2006/main" xmlns:r="http://schemas.openxmlformats.org/officeDocument/2006/relationships" xmlns:p="http://schemas.openxmlformats.org/presentationml/2006/main">
+  <p:cSld>
+    <p:spTree>
+      <p:nvGrpSpPr>
+        <p:cNvPr id="1" name="">
+          <a:extLst>
+            <a:ext uri="{FF2B5EF4-FFF2-40B4-BE49-F238E27FC236}">
               <a16:creationId xmlns:a16="http://schemas.microsoft.com/office/drawing/2014/main" id="{7ACF6FE9-4F90-4073-85F4-29EA4665F003}"/>
             </a:ext>
           </a:extLst>
@@ -5817,7 +6069,7 @@
 </p:sld>
 </file>
 
-<file path=ppt/slides/slide12.xml><?xml version="1.0" encoding="utf-8"?>
+<file path=ppt/slides/slide13.xml><?xml version="1.0" encoding="utf-8"?>
 <p:sld xmlns:a="http://schemas.openxmlformats.org/drawingml/2006/main" xmlns:r="http://schemas.openxmlformats.org/officeDocument/2006/relationships" xmlns:p="http://schemas.openxmlformats.org/presentationml/2006/main">
   <p:cSld>
     <p:spTree>
@@ -5999,7 +6251,7 @@
 </p:sld>
 </file>
 
-<file path=ppt/slides/slide13.xml><?xml version="1.0" encoding="utf-8"?>
+<file path=ppt/slides/slide14.xml><?xml version="1.0" encoding="utf-8"?>
 <p:sld xmlns:a="http://schemas.openxmlformats.org/drawingml/2006/main" xmlns:r="http://schemas.openxmlformats.org/officeDocument/2006/relationships" xmlns:p="http://schemas.openxmlformats.org/presentationml/2006/main">
   <p:cSld>
     <p:spTree>
@@ -6141,7 +6393,7 @@
 </p:sld>
 </file>
 
-<file path=ppt/slides/slide14.xml><?xml version="1.0" encoding="utf-8"?>
+<file path=ppt/slides/slide15.xml><?xml version="1.0" encoding="utf-8"?>
 <p:sld xmlns:a="http://schemas.openxmlformats.org/drawingml/2006/main" xmlns:r="http://schemas.openxmlformats.org/officeDocument/2006/relationships" xmlns:p="http://schemas.openxmlformats.org/presentationml/2006/main">
   <p:cSld>
     <p:spTree>
@@ -6388,7 +6640,7 @@
 </p:sld>
 </file>
 
-<file path=ppt/slides/slide15.xml><?xml version="1.0" encoding="utf-8"?>
+<file path=ppt/slides/slide16.xml><?xml version="1.0" encoding="utf-8"?>
 <p:sld xmlns:a="http://schemas.openxmlformats.org/drawingml/2006/main" xmlns:r="http://schemas.openxmlformats.org/officeDocument/2006/relationships" xmlns:p="http://schemas.openxmlformats.org/presentationml/2006/main">
   <p:cSld>
     <p:spTree>
@@ -6594,7 +6846,7 @@
 </p:sld>
 </file>
 
-<file path=ppt/slides/slide16.xml><?xml version="1.0" encoding="utf-8"?>
+<file path=ppt/slides/slide17.xml><?xml version="1.0" encoding="utf-8"?>
 <p:sld xmlns:a="http://schemas.openxmlformats.org/drawingml/2006/main" xmlns:r="http://schemas.openxmlformats.org/officeDocument/2006/relationships" xmlns:p="http://schemas.openxmlformats.org/presentationml/2006/main">
   <p:cSld>
     <p:spTree>
@@ -6707,8 +6959,8 @@
         </p:nvSpPr>
         <p:spPr>
           <a:xfrm>
-            <a:off x="1330817" y="3370286"/>
-            <a:ext cx="10963768" cy="2592632"/>
+            <a:off x="1778985" y="3370286"/>
+            <a:ext cx="10515600" cy="1842217"/>
           </a:xfrm>
           <a:prstGeom prst="rect">
             <a:avLst/>
@@ -6762,30 +7014,6 @@
             </a:r>
             <a:endParaRPr lang="en-US" sz="3600" dirty="0"/>
           </a:p>
-          <a:p>
-            <a:pPr>
-              <a:spcAft>
-                <a:spcPts val="1200"/>
-              </a:spcAft>
-            </a:pPr>
-            <a:endParaRPr lang="en-US" sz="3600" dirty="0"/>
-          </a:p>
-          <a:p>
-            <a:pPr>
-              <a:spcAft>
-                <a:spcPts val="1200"/>
-              </a:spcAft>
-            </a:pPr>
-            <a:r>
-              <a:rPr lang="en-US" sz="2000" dirty="0"/>
-              <a:t>Note: Images from </a:t>
-            </a:r>
-            <a:r>
-              <a:rPr lang="en-US" sz="2000" dirty="0" err="1"/>
-              <a:t>chatgpt</a:t>
-            </a:r>
-            <a:endParaRPr lang="en-US" sz="2000" dirty="0"/>
-          </a:p>
         </p:txBody>
       </p:sp>
     </p:spTree>
@@ -6801,7 +7029,7 @@
 </p:sld>
 </file>
 
-<file path=ppt/slides/slide17.xml><?xml version="1.0" encoding="utf-8"?>
+<file path=ppt/slides/slide18.xml><?xml version="1.0" encoding="utf-8"?>
 <p:sld xmlns:a="http://schemas.openxmlformats.org/drawingml/2006/main" xmlns:r="http://schemas.openxmlformats.org/officeDocument/2006/relationships" xmlns:p="http://schemas.openxmlformats.org/presentationml/2006/main">
   <p:cSld>
     <p:spTree>
@@ -7718,8 +7946,8 @@
         </p:nvSpPr>
         <p:spPr>
           <a:xfrm>
-            <a:off x="993059" y="1572703"/>
-            <a:ext cx="10166556" cy="2123658"/>
+            <a:off x="644014" y="1423841"/>
+            <a:ext cx="10709785" cy="4893647"/>
           </a:xfrm>
           <a:prstGeom prst="rect">
             <a:avLst/>
@@ -7758,6 +7986,32 @@
             </a:r>
           </a:p>
           <a:p>
+            <a:pPr marL="1371600" lvl="2" indent="-457200">
+              <a:spcBef>
+                <a:spcPts val="1200"/>
+              </a:spcBef>
+              <a:buFont typeface="Wingdings" panose="05000000000000000000" pitchFamily="2" charset="2"/>
+              <a:buChar char="Ø"/>
+            </a:pPr>
+            <a:r>
+              <a:rPr lang="en-US" sz="2800" dirty="0"/>
+              <a:t>Given a week in advance (5 questions), schedule a 20-minute meeting with me outside of class</a:t>
+            </a:r>
+          </a:p>
+          <a:p>
+            <a:pPr marL="1371600" lvl="2" indent="-457200">
+              <a:spcBef>
+                <a:spcPts val="1200"/>
+              </a:spcBef>
+              <a:buFont typeface="Wingdings" panose="05000000000000000000" pitchFamily="2" charset="2"/>
+              <a:buChar char="Ø"/>
+            </a:pPr>
+            <a:r>
+              <a:rPr lang="en-US" sz="2800" dirty="0"/>
+              <a:t> The student chose one question, and I chose one question</a:t>
+            </a:r>
+          </a:p>
+          <a:p>
             <a:pPr marL="914400" lvl="1" indent="-457200">
               <a:spcBef>
                 <a:spcPts val="1200"/>
@@ -7768,6 +8022,32 @@
             <a:r>
               <a:rPr lang="en-US" sz="2800" dirty="0"/>
               <a:t>Format 2:  Minimal preparation with individualized questions.</a:t>
+            </a:r>
+          </a:p>
+          <a:p>
+            <a:pPr marL="1371600" lvl="2" indent="-457200">
+              <a:spcBef>
+                <a:spcPts val="1200"/>
+              </a:spcBef>
+              <a:buFont typeface="Wingdings" panose="05000000000000000000" pitchFamily="2" charset="2"/>
+              <a:buChar char="Ø"/>
+            </a:pPr>
+            <a:r>
+              <a:rPr lang="en-US" sz="2800" dirty="0"/>
+              <a:t>Given 45 minutes outside my office to work on two problems</a:t>
+            </a:r>
+          </a:p>
+          <a:p>
+            <a:pPr marL="1371600" lvl="2" indent="-457200">
+              <a:spcBef>
+                <a:spcPts val="1200"/>
+              </a:spcBef>
+              <a:buFont typeface="Wingdings" panose="05000000000000000000" pitchFamily="2" charset="2"/>
+              <a:buChar char="Ø"/>
+            </a:pPr>
+            <a:r>
+              <a:rPr lang="en-US" sz="2800" dirty="0"/>
+              <a:t> 30-minute oral exam immediately after.</a:t>
             </a:r>
           </a:p>
         </p:txBody>

--- a/eCOTS 2026 Oral Exams.pptx
+++ b/eCOTS 2026 Oral Exams.pptx
@@ -5,7 +5,7 @@
     <p:sldMasterId id="2147483648" r:id="rId1"/>
   </p:sldMasterIdLst>
   <p:notesMasterIdLst>
-    <p:notesMasterId r:id="rId20"/>
+    <p:notesMasterId r:id="rId19"/>
   </p:notesMasterIdLst>
   <p:sldIdLst>
     <p:sldId id="256" r:id="rId2"/>
@@ -18,14 +18,13 @@
     <p:sldId id="268" r:id="rId9"/>
     <p:sldId id="265" r:id="rId10"/>
     <p:sldId id="267" r:id="rId11"/>
-    <p:sldId id="273" r:id="rId12"/>
-    <p:sldId id="266" r:id="rId13"/>
-    <p:sldId id="269" r:id="rId14"/>
-    <p:sldId id="270" r:id="rId15"/>
-    <p:sldId id="260" r:id="rId16"/>
-    <p:sldId id="261" r:id="rId17"/>
-    <p:sldId id="262" r:id="rId18"/>
-    <p:sldId id="263" r:id="rId19"/>
+    <p:sldId id="266" r:id="rId12"/>
+    <p:sldId id="269" r:id="rId13"/>
+    <p:sldId id="270" r:id="rId14"/>
+    <p:sldId id="260" r:id="rId15"/>
+    <p:sldId id="261" r:id="rId16"/>
+    <p:sldId id="262" r:id="rId17"/>
+    <p:sldId id="263" r:id="rId18"/>
   </p:sldIdLst>
   <p:sldSz cx="12192000" cy="6858000"/>
   <p:notesSz cx="6858000" cy="9144000"/>
@@ -139,7 +138,6 @@
             <p14:sldId id="268"/>
             <p14:sldId id="265"/>
             <p14:sldId id="267"/>
-            <p14:sldId id="273"/>
             <p14:sldId id="266"/>
             <p14:sldId id="269"/>
             <p14:sldId id="270"/>
@@ -292,7 +290,7 @@
           <a:p>
             <a:fld id="{947604D3-08DC-4625-B6BA-EDA174851E58}" type="datetimeFigureOut">
               <a:rPr lang="en-US" smtClean="0"/>
-              <a:t>6/14/2026</a:t>
+              <a:t>6/16/2026</a:t>
             </a:fld>
             <a:endParaRPr lang="en-US"/>
           </a:p>
@@ -741,10 +739,7 @@
           <a:bodyPr/>
           <a:lstStyle/>
           <a:p>
-            <a:r>
-              <a:rPr lang="en-US" dirty="0"/>
-              <a:t>Here, we could pull up an example of each “test”, as well as how we evaluated the students</a:t>
-            </a:r>
+            <a:endParaRPr lang="en-US" dirty="0"/>
           </a:p>
         </p:txBody>
       </p:sp>
@@ -774,7 +769,7 @@
     </p:spTree>
     <p:extLst>
       <p:ext uri="{BB962C8B-B14F-4D97-AF65-F5344CB8AC3E}">
-        <p14:creationId xmlns:p14="http://schemas.microsoft.com/office/powerpoint/2010/main" val="849594660"/>
+        <p14:creationId xmlns:p14="http://schemas.microsoft.com/office/powerpoint/2010/main" val="3806378361"/>
       </p:ext>
     </p:extLst>
   </p:cSld>
@@ -858,7 +853,7 @@
     </p:spTree>
     <p:extLst>
       <p:ext uri="{BB962C8B-B14F-4D97-AF65-F5344CB8AC3E}">
-        <p14:creationId xmlns:p14="http://schemas.microsoft.com/office/powerpoint/2010/main" val="3806378361"/>
+        <p14:creationId xmlns:p14="http://schemas.microsoft.com/office/powerpoint/2010/main" val="485954547"/>
       </p:ext>
     </p:extLst>
   </p:cSld>
@@ -912,7 +907,10 @@
           <a:bodyPr/>
           <a:lstStyle/>
           <a:p>
-            <a:endParaRPr lang="en-US" dirty="0"/>
+            <a:r>
+              <a:rPr lang="en-US" dirty="0"/>
+              <a:t>Other bullets I’m not thinking about?</a:t>
+            </a:r>
           </a:p>
         </p:txBody>
       </p:sp>
@@ -942,7 +940,7 @@
     </p:spTree>
     <p:extLst>
       <p:ext uri="{BB962C8B-B14F-4D97-AF65-F5344CB8AC3E}">
-        <p14:creationId xmlns:p14="http://schemas.microsoft.com/office/powerpoint/2010/main" val="485954547"/>
+        <p14:creationId xmlns:p14="http://schemas.microsoft.com/office/powerpoint/2010/main" val="2742176703"/>
       </p:ext>
     </p:extLst>
   </p:cSld>
@@ -998,7 +996,16 @@
           <a:p>
             <a:r>
               <a:rPr lang="en-US" dirty="0"/>
-              <a:t>Other bullets I’m not thinking about?</a:t>
+              <a:t>Maybe switch the order of these two groupings?</a:t>
+            </a:r>
+          </a:p>
+          <a:p>
+            <a:endParaRPr lang="en-US" dirty="0"/>
+          </a:p>
+          <a:p>
+            <a:r>
+              <a:rPr lang="en-US" dirty="0"/>
+              <a:t>Yes, I think so! (Done)</a:t>
             </a:r>
           </a:p>
         </p:txBody>
@@ -1021,102 +1028,6 @@
             <a:fld id="{95A82AF3-FB5A-4FBE-8E9E-E0D407A949E2}" type="slidenum">
               <a:rPr lang="en-US" smtClean="0"/>
               <a:t>15</a:t>
-            </a:fld>
-            <a:endParaRPr lang="en-US"/>
-          </a:p>
-        </p:txBody>
-      </p:sp>
-    </p:spTree>
-    <p:extLst>
-      <p:ext uri="{BB962C8B-B14F-4D97-AF65-F5344CB8AC3E}">
-        <p14:creationId xmlns:p14="http://schemas.microsoft.com/office/powerpoint/2010/main" val="2742176703"/>
-      </p:ext>
-    </p:extLst>
-  </p:cSld>
-  <p:clrMapOvr>
-    <a:masterClrMapping/>
-  </p:clrMapOvr>
-</p:notes>
-</file>
-
-<file path=ppt/notesSlides/notesSlide14.xml><?xml version="1.0" encoding="utf-8"?>
-<p:notes xmlns:a="http://schemas.openxmlformats.org/drawingml/2006/main" xmlns:r="http://schemas.openxmlformats.org/officeDocument/2006/relationships" xmlns:p="http://schemas.openxmlformats.org/presentationml/2006/main">
-  <p:cSld>
-    <p:spTree>
-      <p:nvGrpSpPr>
-        <p:cNvPr id="1" name=""/>
-        <p:cNvGrpSpPr/>
-        <p:nvPr/>
-      </p:nvGrpSpPr>
-      <p:grpSpPr>
-        <a:xfrm>
-          <a:off x="0" y="0"/>
-          <a:ext cx="0" cy="0"/>
-          <a:chOff x="0" y="0"/>
-          <a:chExt cx="0" cy="0"/>
-        </a:xfrm>
-      </p:grpSpPr>
-      <p:sp>
-        <p:nvSpPr>
-          <p:cNvPr id="2" name="Slide Image Placeholder 1"/>
-          <p:cNvSpPr>
-            <a:spLocks noGrp="1" noRot="1" noChangeAspect="1"/>
-          </p:cNvSpPr>
-          <p:nvPr>
-            <p:ph type="sldImg"/>
-          </p:nvPr>
-        </p:nvSpPr>
-        <p:spPr/>
-      </p:sp>
-      <p:sp>
-        <p:nvSpPr>
-          <p:cNvPr id="3" name="Notes Placeholder 2"/>
-          <p:cNvSpPr>
-            <a:spLocks noGrp="1"/>
-          </p:cNvSpPr>
-          <p:nvPr>
-            <p:ph type="body" idx="1"/>
-          </p:nvPr>
-        </p:nvSpPr>
-        <p:spPr/>
-        <p:txBody>
-          <a:bodyPr/>
-          <a:lstStyle/>
-          <a:p>
-            <a:r>
-              <a:rPr lang="en-US" dirty="0"/>
-              <a:t>Maybe switch the order of these two groupings?</a:t>
-            </a:r>
-          </a:p>
-          <a:p>
-            <a:endParaRPr lang="en-US" dirty="0"/>
-          </a:p>
-          <a:p>
-            <a:r>
-              <a:rPr lang="en-US" dirty="0"/>
-              <a:t>Yes, I think so! (Done)</a:t>
-            </a:r>
-          </a:p>
-        </p:txBody>
-      </p:sp>
-      <p:sp>
-        <p:nvSpPr>
-          <p:cNvPr id="4" name="Slide Number Placeholder 3"/>
-          <p:cNvSpPr>
-            <a:spLocks noGrp="1"/>
-          </p:cNvSpPr>
-          <p:nvPr>
-            <p:ph type="sldNum" sz="quarter" idx="5"/>
-          </p:nvPr>
-        </p:nvSpPr>
-        <p:spPr/>
-        <p:txBody>
-          <a:bodyPr/>
-          <a:lstStyle/>
-          <a:p>
-            <a:fld id="{95A82AF3-FB5A-4FBE-8E9E-E0D407A949E2}" type="slidenum">
-              <a:rPr lang="en-US" smtClean="0"/>
-              <a:t>16</a:t>
             </a:fld>
             <a:endParaRPr lang="en-US"/>
           </a:p>
@@ -1866,13 +1777,7 @@
   <p:cSld>
     <p:spTree>
       <p:nvGrpSpPr>
-        <p:cNvPr id="1" name="">
-          <a:extLst>
-            <a:ext uri="{FF2B5EF4-FFF2-40B4-BE49-F238E27FC236}">
-              <a16:creationId xmlns:a16="http://schemas.microsoft.com/office/drawing/2014/main" id="{D840253B-E875-17A7-63C8-3158A4FB2D66}"/>
-            </a:ext>
-          </a:extLst>
-        </p:cNvPr>
+        <p:cNvPr id="1" name=""/>
         <p:cNvGrpSpPr/>
         <p:nvPr/>
       </p:nvGrpSpPr>
@@ -1886,13 +1791,7 @@
       </p:grpSpPr>
       <p:sp>
         <p:nvSpPr>
-          <p:cNvPr id="2" name="Slide Image Placeholder 1">
-            <a:extLst>
-              <a:ext uri="{FF2B5EF4-FFF2-40B4-BE49-F238E27FC236}">
-                <a16:creationId xmlns:a16="http://schemas.microsoft.com/office/drawing/2014/main" id="{A381B1A6-F443-E4AD-34DF-9939FD3852EE}"/>
-              </a:ext>
-            </a:extLst>
-          </p:cNvPr>
+          <p:cNvPr id="2" name="Slide Image Placeholder 1"/>
           <p:cNvSpPr>
             <a:spLocks noGrp="1" noRot="1" noChangeAspect="1"/>
           </p:cNvSpPr>
@@ -1904,13 +1803,7 @@
       </p:sp>
       <p:sp>
         <p:nvSpPr>
-          <p:cNvPr id="3" name="Notes Placeholder 2">
-            <a:extLst>
-              <a:ext uri="{FF2B5EF4-FFF2-40B4-BE49-F238E27FC236}">
-                <a16:creationId xmlns:a16="http://schemas.microsoft.com/office/drawing/2014/main" id="{7E943525-A19B-EB8A-BF0F-6275A6B68428}"/>
-              </a:ext>
-            </a:extLst>
-          </p:cNvPr>
+          <p:cNvPr id="3" name="Notes Placeholder 2"/>
           <p:cNvSpPr>
             <a:spLocks noGrp="1"/>
           </p:cNvSpPr>
@@ -1923,19 +1816,16 @@
           <a:bodyPr/>
           <a:lstStyle/>
           <a:p>
-            <a:endParaRPr lang="en-US" dirty="0"/>
-          </a:p>
-        </p:txBody>
-      </p:sp>
-      <p:sp>
-        <p:nvSpPr>
-          <p:cNvPr id="4" name="Slide Number Placeholder 3">
-            <a:extLst>
-              <a:ext uri="{FF2B5EF4-FFF2-40B4-BE49-F238E27FC236}">
-                <a16:creationId xmlns:a16="http://schemas.microsoft.com/office/drawing/2014/main" id="{CF7A1A31-C92D-E2E9-8CA9-B1C1578F25C6}"/>
-              </a:ext>
-            </a:extLst>
-          </p:cNvPr>
+            <a:r>
+              <a:rPr lang="en-US" dirty="0"/>
+              <a:t>Here, we could pull up an example of each “test”, as well as how we evaluated the students</a:t>
+            </a:r>
+          </a:p>
+        </p:txBody>
+      </p:sp>
+      <p:sp>
+        <p:nvSpPr>
+          <p:cNvPr id="4" name="Slide Number Placeholder 3"/>
           <p:cNvSpPr>
             <a:spLocks noGrp="1"/>
           </p:cNvSpPr>
@@ -1959,7 +1849,7 @@
     </p:spTree>
     <p:extLst>
       <p:ext uri="{BB962C8B-B14F-4D97-AF65-F5344CB8AC3E}">
-        <p14:creationId xmlns:p14="http://schemas.microsoft.com/office/powerpoint/2010/main" val="2249426986"/>
+        <p14:creationId xmlns:p14="http://schemas.microsoft.com/office/powerpoint/2010/main" val="849594660"/>
       </p:ext>
     </p:extLst>
   </p:cSld>
@@ -2116,7 +2006,7 @@
           <a:p>
             <a:fld id="{42D22C8A-5ABF-4B07-AADE-831C06312145}" type="datetimeFigureOut">
               <a:rPr lang="en-US" smtClean="0"/>
-              <a:t>6/14/2026</a:t>
+              <a:t>6/16/2026</a:t>
             </a:fld>
             <a:endParaRPr lang="en-US"/>
           </a:p>
@@ -2314,7 +2204,7 @@
           <a:p>
             <a:fld id="{42D22C8A-5ABF-4B07-AADE-831C06312145}" type="datetimeFigureOut">
               <a:rPr lang="en-US" smtClean="0"/>
-              <a:t>6/14/2026</a:t>
+              <a:t>6/16/2026</a:t>
             </a:fld>
             <a:endParaRPr lang="en-US"/>
           </a:p>
@@ -2522,7 +2412,7 @@
           <a:p>
             <a:fld id="{42D22C8A-5ABF-4B07-AADE-831C06312145}" type="datetimeFigureOut">
               <a:rPr lang="en-US" smtClean="0"/>
-              <a:t>6/14/2026</a:t>
+              <a:t>6/16/2026</a:t>
             </a:fld>
             <a:endParaRPr lang="en-US"/>
           </a:p>
@@ -2720,7 +2610,7 @@
           <a:p>
             <a:fld id="{42D22C8A-5ABF-4B07-AADE-831C06312145}" type="datetimeFigureOut">
               <a:rPr lang="en-US" smtClean="0"/>
-              <a:t>6/14/2026</a:t>
+              <a:t>6/16/2026</a:t>
             </a:fld>
             <a:endParaRPr lang="en-US"/>
           </a:p>
@@ -2995,7 +2885,7 @@
           <a:p>
             <a:fld id="{42D22C8A-5ABF-4B07-AADE-831C06312145}" type="datetimeFigureOut">
               <a:rPr lang="en-US" smtClean="0"/>
-              <a:t>6/14/2026</a:t>
+              <a:t>6/16/2026</a:t>
             </a:fld>
             <a:endParaRPr lang="en-US"/>
           </a:p>
@@ -3260,7 +3150,7 @@
           <a:p>
             <a:fld id="{42D22C8A-5ABF-4B07-AADE-831C06312145}" type="datetimeFigureOut">
               <a:rPr lang="en-US" smtClean="0"/>
-              <a:t>6/14/2026</a:t>
+              <a:t>6/16/2026</a:t>
             </a:fld>
             <a:endParaRPr lang="en-US"/>
           </a:p>
@@ -3672,7 +3562,7 @@
           <a:p>
             <a:fld id="{42D22C8A-5ABF-4B07-AADE-831C06312145}" type="datetimeFigureOut">
               <a:rPr lang="en-US" smtClean="0"/>
-              <a:t>6/14/2026</a:t>
+              <a:t>6/16/2026</a:t>
             </a:fld>
             <a:endParaRPr lang="en-US"/>
           </a:p>
@@ -3813,7 +3703,7 @@
           <a:p>
             <a:fld id="{42D22C8A-5ABF-4B07-AADE-831C06312145}" type="datetimeFigureOut">
               <a:rPr lang="en-US" smtClean="0"/>
-              <a:t>6/14/2026</a:t>
+              <a:t>6/16/2026</a:t>
             </a:fld>
             <a:endParaRPr lang="en-US"/>
           </a:p>
@@ -3926,7 +3816,7 @@
           <a:p>
             <a:fld id="{42D22C8A-5ABF-4B07-AADE-831C06312145}" type="datetimeFigureOut">
               <a:rPr lang="en-US" smtClean="0"/>
-              <a:t>6/14/2026</a:t>
+              <a:t>6/16/2026</a:t>
             </a:fld>
             <a:endParaRPr lang="en-US"/>
           </a:p>
@@ -4237,7 +4127,7 @@
           <a:p>
             <a:fld id="{42D22C8A-5ABF-4B07-AADE-831C06312145}" type="datetimeFigureOut">
               <a:rPr lang="en-US" smtClean="0"/>
-              <a:t>6/14/2026</a:t>
+              <a:t>6/16/2026</a:t>
             </a:fld>
             <a:endParaRPr lang="en-US"/>
           </a:p>
@@ -4525,7 +4415,7 @@
           <a:p>
             <a:fld id="{42D22C8A-5ABF-4B07-AADE-831C06312145}" type="datetimeFigureOut">
               <a:rPr lang="en-US" smtClean="0"/>
-              <a:t>6/14/2026</a:t>
+              <a:t>6/16/2026</a:t>
             </a:fld>
             <a:endParaRPr lang="en-US"/>
           </a:p>
@@ -4766,7 +4656,7 @@
           <a:p>
             <a:fld id="{42D22C8A-5ABF-4B07-AADE-831C06312145}" type="datetimeFigureOut">
               <a:rPr lang="en-US" smtClean="0"/>
-              <a:t>6/14/2026</a:t>
+              <a:t>6/16/2026</a:t>
             </a:fld>
             <a:endParaRPr lang="en-US"/>
           </a:p>
@@ -5696,148 +5586,6 @@
         <p:cNvPr id="1" name="">
           <a:extLst>
             <a:ext uri="{FF2B5EF4-FFF2-40B4-BE49-F238E27FC236}">
-              <a16:creationId xmlns:a16="http://schemas.microsoft.com/office/drawing/2014/main" id="{66130728-F55E-25CA-496C-04107DED744E}"/>
-            </a:ext>
-          </a:extLst>
-        </p:cNvPr>
-        <p:cNvGrpSpPr/>
-        <p:nvPr/>
-      </p:nvGrpSpPr>
-      <p:grpSpPr>
-        <a:xfrm>
-          <a:off x="0" y="0"/>
-          <a:ext cx="0" cy="0"/>
-          <a:chOff x="0" y="0"/>
-          <a:chExt cx="0" cy="0"/>
-        </a:xfrm>
-      </p:grpSpPr>
-      <p:pic>
-        <p:nvPicPr>
-          <p:cNvPr id="5" name="Content Placeholder 4">
-            <a:extLst>
-              <a:ext uri="{FF2B5EF4-FFF2-40B4-BE49-F238E27FC236}">
-                <a16:creationId xmlns:a16="http://schemas.microsoft.com/office/drawing/2014/main" id="{ACEBBDA5-C7D8-16B1-5992-1F94E20F02C8}"/>
-              </a:ext>
-            </a:extLst>
-          </p:cNvPr>
-          <p:cNvPicPr>
-            <a:picLocks noGrp="1" noChangeAspect="1"/>
-          </p:cNvPicPr>
-          <p:nvPr>
-            <p:ph idx="1"/>
-          </p:nvPr>
-        </p:nvPicPr>
-        <p:blipFill>
-          <a:blip r:embed="rId3">
-            <a:extLst>
-              <a:ext uri="{28A0092B-C50C-407E-A947-70E740481C1C}">
-                <a14:useLocalDpi xmlns:a14="http://schemas.microsoft.com/office/drawing/2010/main" val="0"/>
-              </a:ext>
-            </a:extLst>
-          </a:blip>
-          <a:stretch>
-            <a:fillRect/>
-          </a:stretch>
-        </p:blipFill>
-        <p:spPr>
-          <a:xfrm>
-            <a:off x="281354" y="271305"/>
-            <a:ext cx="11599921" cy="6330462"/>
-          </a:xfrm>
-          <a:prstGeom prst="rect">
-            <a:avLst/>
-          </a:prstGeom>
-        </p:spPr>
-      </p:pic>
-      <p:sp>
-        <p:nvSpPr>
-          <p:cNvPr id="2" name="Title 1">
-            <a:extLst>
-              <a:ext uri="{FF2B5EF4-FFF2-40B4-BE49-F238E27FC236}">
-                <a16:creationId xmlns:a16="http://schemas.microsoft.com/office/drawing/2014/main" id="{FEC9E5DE-F271-DE75-273E-17E49AA929A2}"/>
-              </a:ext>
-            </a:extLst>
-          </p:cNvPr>
-          <p:cNvSpPr>
-            <a:spLocks noGrp="1"/>
-          </p:cNvSpPr>
-          <p:nvPr>
-            <p:ph type="title"/>
-          </p:nvPr>
-        </p:nvSpPr>
-        <p:spPr/>
-        <p:txBody>
-          <a:bodyPr/>
-          <a:lstStyle/>
-          <a:p>
-            <a:r>
-              <a:rPr lang="en-US" dirty="0"/>
-              <a:t>Rubric</a:t>
-            </a:r>
-          </a:p>
-        </p:txBody>
-      </p:sp>
-      <p:pic>
-        <p:nvPicPr>
-          <p:cNvPr id="4" name="Picture 3">
-            <a:extLst>
-              <a:ext uri="{FF2B5EF4-FFF2-40B4-BE49-F238E27FC236}">
-                <a16:creationId xmlns:a16="http://schemas.microsoft.com/office/drawing/2014/main" id="{316B88F2-AB4C-ABD8-6EAE-B8DBC15055CD}"/>
-              </a:ext>
-            </a:extLst>
-          </p:cNvPr>
-          <p:cNvPicPr>
-            <a:picLocks noChangeAspect="1"/>
-          </p:cNvPicPr>
-          <p:nvPr/>
-        </p:nvPicPr>
-        <p:blipFill>
-          <a:blip r:embed="rId4"/>
-          <a:stretch>
-            <a:fillRect/>
-          </a:stretch>
-        </p:blipFill>
-        <p:spPr>
-          <a:xfrm>
-            <a:off x="1176269" y="1513276"/>
-            <a:ext cx="8427077" cy="4644168"/>
-          </a:xfrm>
-          <a:prstGeom prst="rect">
-            <a:avLst/>
-          </a:prstGeom>
-          <a:ln>
-            <a:noFill/>
-          </a:ln>
-          <a:effectLst>
-            <a:outerShdw blurRad="292100" dist="139700" dir="2700000" algn="tl" rotWithShape="0">
-              <a:srgbClr val="333333">
-                <a:alpha val="65000"/>
-              </a:srgbClr>
-            </a:outerShdw>
-          </a:effectLst>
-        </p:spPr>
-      </p:pic>
-    </p:spTree>
-    <p:extLst>
-      <p:ext uri="{BB962C8B-B14F-4D97-AF65-F5344CB8AC3E}">
-        <p14:creationId xmlns:p14="http://schemas.microsoft.com/office/powerpoint/2010/main" val="3592104557"/>
-      </p:ext>
-    </p:extLst>
-  </p:cSld>
-  <p:clrMapOvr>
-    <a:masterClrMapping/>
-  </p:clrMapOvr>
-</p:sld>
-</file>
-
-<file path=ppt/slides/slide12.xml><?xml version="1.0" encoding="utf-8"?>
-<p:sld xmlns:a="http://schemas.openxmlformats.org/drawingml/2006/main" xmlns:r="http://schemas.openxmlformats.org/officeDocument/2006/relationships" xmlns:p="http://schemas.openxmlformats.org/presentationml/2006/main">
-  <p:cSld>
-    <p:spTree>
-      <p:nvGrpSpPr>
-        <p:cNvPr id="1" name="">
-          <a:extLst>
-            <a:ext uri="{FF2B5EF4-FFF2-40B4-BE49-F238E27FC236}">
               <a16:creationId xmlns:a16="http://schemas.microsoft.com/office/drawing/2014/main" id="{7ACF6FE9-4F90-4073-85F4-29EA4665F003}"/>
             </a:ext>
           </a:extLst>
@@ -6069,7 +5817,7 @@
 </p:sld>
 </file>
 
-<file path=ppt/slides/slide13.xml><?xml version="1.0" encoding="utf-8"?>
+<file path=ppt/slides/slide12.xml><?xml version="1.0" encoding="utf-8"?>
 <p:sld xmlns:a="http://schemas.openxmlformats.org/drawingml/2006/main" xmlns:r="http://schemas.openxmlformats.org/officeDocument/2006/relationships" xmlns:p="http://schemas.openxmlformats.org/presentationml/2006/main">
   <p:cSld>
     <p:spTree>
@@ -6251,7 +5999,7 @@
 </p:sld>
 </file>
 
-<file path=ppt/slides/slide14.xml><?xml version="1.0" encoding="utf-8"?>
+<file path=ppt/slides/slide13.xml><?xml version="1.0" encoding="utf-8"?>
 <p:sld xmlns:a="http://schemas.openxmlformats.org/drawingml/2006/main" xmlns:r="http://schemas.openxmlformats.org/officeDocument/2006/relationships" xmlns:p="http://schemas.openxmlformats.org/presentationml/2006/main">
   <p:cSld>
     <p:spTree>
@@ -6393,7 +6141,7 @@
 </p:sld>
 </file>
 
-<file path=ppt/slides/slide15.xml><?xml version="1.0" encoding="utf-8"?>
+<file path=ppt/slides/slide14.xml><?xml version="1.0" encoding="utf-8"?>
 <p:sld xmlns:a="http://schemas.openxmlformats.org/drawingml/2006/main" xmlns:r="http://schemas.openxmlformats.org/officeDocument/2006/relationships" xmlns:p="http://schemas.openxmlformats.org/presentationml/2006/main">
   <p:cSld>
     <p:spTree>
@@ -6640,7 +6388,7 @@
 </p:sld>
 </file>
 
-<file path=ppt/slides/slide16.xml><?xml version="1.0" encoding="utf-8"?>
+<file path=ppt/slides/slide15.xml><?xml version="1.0" encoding="utf-8"?>
 <p:sld xmlns:a="http://schemas.openxmlformats.org/drawingml/2006/main" xmlns:r="http://schemas.openxmlformats.org/officeDocument/2006/relationships" xmlns:p="http://schemas.openxmlformats.org/presentationml/2006/main">
   <p:cSld>
     <p:spTree>
@@ -6846,7 +6594,7 @@
 </p:sld>
 </file>
 
-<file path=ppt/slides/slide17.xml><?xml version="1.0" encoding="utf-8"?>
+<file path=ppt/slides/slide16.xml><?xml version="1.0" encoding="utf-8"?>
 <p:sld xmlns:a="http://schemas.openxmlformats.org/drawingml/2006/main" xmlns:r="http://schemas.openxmlformats.org/officeDocument/2006/relationships" xmlns:p="http://schemas.openxmlformats.org/presentationml/2006/main">
   <p:cSld>
     <p:spTree>
@@ -7029,7 +6777,7 @@
 </p:sld>
 </file>
 
-<file path=ppt/slides/slide18.xml><?xml version="1.0" encoding="utf-8"?>
+<file path=ppt/slides/slide17.xml><?xml version="1.0" encoding="utf-8"?>
 <p:sld xmlns:a="http://schemas.openxmlformats.org/drawingml/2006/main" xmlns:r="http://schemas.openxmlformats.org/officeDocument/2006/relationships" xmlns:p="http://schemas.openxmlformats.org/presentationml/2006/main">
   <p:cSld>
     <p:spTree>
